--- a/docs/final/RUDP_Presentation_with_notes.pptx
+++ b/docs/final/RUDP_Presentation_with_notes.pptx
@@ -848,7 +848,12 @@
           </a:p>
           <a:p>
             <a:r>
-              <a:t>- RFC 5681 is the standard; CUBIC is our future-work direction; QUIC and RFC 9000 are reliable transport over UDP in production.</a:t>
+              <a:t>- RFC 5681 is the standard; CUBIC is future work; QUIC and RFC 9000 are reliable transport over UDP in production.</a:t>
+            </a:r>
+          </a:p>
+          <a:p>
+            <a:r>
+              <a:t>- The AI part comes from Midhula and Arun Raj Kumar (2024) and Cao et al. (2023, DRLFcc): deep reinforcement learning for congestion control. Smart-RUDP applies the same idea with a smaller tabular Q-learning agent.</a:t>
             </a:r>
           </a:p>
           <a:p>
@@ -859,7 +864,7 @@
           <a:p/>
           <a:p>
             <a:r>
-              <a:t>IF ASKED: Q: Why AIMD? A: Chiu and Jain show it converges to a fair share.</a:t>
+              <a:t>IF ASKED: Q: Why AIMD? A: Chiu and Jain show it converges to a fair share. Q: Are those papers deep RL and yours is not? A: Yes; we used a lookup table, which is simpler and inspectable.</a:t>
             </a:r>
           </a:p>
         </p:txBody>
@@ -4429,7 +4434,7 @@
         <p:spPr>
           <a:xfrm>
             <a:off x="548640" y="1371600"/>
-            <a:ext cx="11064240" cy="3840480"/>
+            <a:ext cx="11064240" cy="4023360"/>
           </a:xfrm>
           <a:prstGeom prst="rect">
             <a:avLst/>
@@ -4449,7 +4454,7 @@
               <a:buChar char="•"/>
             </a:pPr>
             <a:r>
-              <a:rPr lang="en-US" sz="2000" dirty="0">
+              <a:rPr lang="en-US" sz="1900" dirty="0">
                 <a:solidFill>
                   <a:srgbClr val="E6EDF3"/>
                 </a:solidFill>
@@ -4459,7 +4464,7 @@
               </a:rPr>
               <a:t>Jacobson &amp; Karels (1988): congestion avoidance and control, the origin of AIMD</a:t>
             </a:r>
-            <a:endParaRPr lang="en-US" sz="2000" dirty="0"/>
+            <a:endParaRPr lang="en-US" sz="1900" dirty="0"/>
           </a:p>
           <a:p>
             <a:pPr marL="342900" indent="-342900">
@@ -4470,7 +4475,7 @@
               <a:buChar char="•"/>
             </a:pPr>
             <a:r>
-              <a:rPr lang="en-US" sz="2000" dirty="0">
+              <a:rPr lang="en-US" sz="1900" dirty="0">
                 <a:solidFill>
                   <a:srgbClr val="E6EDF3"/>
                 </a:solidFill>
@@ -4480,7 +4485,7 @@
               </a:rPr>
               <a:t>Chiu &amp; Jain (1989): why additive increase, multiplicative decrease converges fairly</a:t>
             </a:r>
-            <a:endParaRPr lang="en-US" sz="2000" dirty="0"/>
+            <a:endParaRPr lang="en-US" sz="1900" dirty="0"/>
           </a:p>
           <a:p>
             <a:pPr marL="342900" indent="-342900">
@@ -4491,7 +4496,7 @@
               <a:buChar char="•"/>
             </a:pPr>
             <a:r>
-              <a:rPr lang="en-US" sz="2000" dirty="0">
+              <a:rPr lang="en-US" sz="1900" dirty="0">
                 <a:solidFill>
                   <a:srgbClr val="E6EDF3"/>
                 </a:solidFill>
@@ -4501,7 +4506,7 @@
               </a:rPr>
               <a:t>RFC 5681 (2009): TCP congestion control standard</a:t>
             </a:r>
-            <a:endParaRPr lang="en-US" sz="2000" dirty="0"/>
+            <a:endParaRPr lang="en-US" sz="1900" dirty="0"/>
           </a:p>
           <a:p>
             <a:pPr marL="342900" indent="-342900">
@@ -4512,7 +4517,7 @@
               <a:buChar char="•"/>
             </a:pPr>
             <a:r>
-              <a:rPr lang="en-US" sz="2000" dirty="0">
+              <a:rPr lang="en-US" sz="1900" dirty="0">
                 <a:solidFill>
                   <a:srgbClr val="E6EDF3"/>
                 </a:solidFill>
@@ -4522,7 +4527,7 @@
               </a:rPr>
               <a:t>Ha, Rhee, Xu (2008): CUBIC, our future-work direction</a:t>
             </a:r>
-            <a:endParaRPr lang="en-US" sz="2000" dirty="0"/>
+            <a:endParaRPr lang="en-US" sz="1900" dirty="0"/>
           </a:p>
           <a:p>
             <a:pPr marL="342900" indent="-342900">
@@ -4533,7 +4538,7 @@
               <a:buChar char="•"/>
             </a:pPr>
             <a:r>
-              <a:rPr lang="en-US" sz="2000" dirty="0">
+              <a:rPr lang="en-US" sz="1900" dirty="0">
                 <a:solidFill>
                   <a:srgbClr val="E6EDF3"/>
                 </a:solidFill>
@@ -4543,7 +4548,28 @@
               </a:rPr>
               <a:t>Langley et al. (2017) and RFC 9000: QUIC, reliable transport over UDP in production</a:t>
             </a:r>
-            <a:endParaRPr lang="en-US" sz="2000" dirty="0"/>
+            <a:endParaRPr lang="en-US" sz="1900" dirty="0"/>
+          </a:p>
+          <a:p>
+            <a:pPr marL="342900" indent="-342900">
+              <a:spcAft>
+                <a:spcPts val="800"/>
+              </a:spcAft>
+              <a:buSzPct val="100000"/>
+              <a:buChar char="•"/>
+            </a:pPr>
+            <a:r>
+              <a:rPr lang="en-US" sz="1900" dirty="0">
+                <a:solidFill>
+                  <a:srgbClr val="E6EDF3"/>
+                </a:solidFill>
+                <a:latin typeface="Calibri" pitchFamily="34" charset="0"/>
+                <a:ea typeface="Calibri" pitchFamily="34" charset="-122"/>
+                <a:cs typeface="Calibri" pitchFamily="34" charset="-120"/>
+              </a:rPr>
+              <a:t>Midhula &amp; Arun Raj Kumar (2024) and Cao et al. (2023, DRLFcc): deep reinforcement learning for congestion control, the idea behind Smart-RUDP</a:t>
+            </a:r>
+            <a:endParaRPr lang="en-US" sz="1900" dirty="0"/>
           </a:p>
         </p:txBody>
       </p:sp>

--- a/docs/final/RUDP_Presentation_with_notes.pptx
+++ b/docs/final/RUDP_Presentation_with_notes.pptx
@@ -1602,7 +1602,7 @@
           </a:p>
           <a:p>
             <a:r>
-              <a:t>- It uses a fixed window of 8, not the Smart-RUDP controller.</a:t>
+              <a:t>- There is a controller switch: fixed window, AIMD, or Smart-RUDP, which loads the trained table and keeps learning live. A 60-message test button times delivery. Honest result: Smart-RUDP did not beat the simple rules here either.</a:t>
             </a:r>
           </a:p>
           <a:p/>
@@ -6711,7 +6711,28 @@
                 <a:ea typeface="Calibri" pitchFamily="34" charset="-122"/>
                 <a:cs typeface="Calibri" pitchFamily="34" charset="-120"/>
               </a:rPr>
-              <a:t>Uses a fixed window of 8, not the Smart-RUDP controller</a:t>
+              <a:t>Window controller switch: fixed, AIMD or Smart-RUDP (Q-learning, learns live)</a:t>
+            </a:r>
+            <a:endParaRPr lang="en-US" sz="1600" dirty="0"/>
+          </a:p>
+          <a:p>
+            <a:pPr marL="342900" indent="-342900">
+              <a:spcAft>
+                <a:spcPts val="800"/>
+              </a:spcAft>
+              <a:buSzPct val="100000"/>
+              <a:buChar char="•"/>
+            </a:pPr>
+            <a:r>
+              <a:rPr lang="en-US" sz="1600" dirty="0">
+                <a:solidFill>
+                  <a:srgbClr val="E6EDF3"/>
+                </a:solidFill>
+                <a:latin typeface="Calibri" pitchFamily="34" charset="0"/>
+                <a:ea typeface="Calibri" pitchFamily="34" charset="-122"/>
+                <a:cs typeface="Calibri" pitchFamily="34" charset="-120"/>
+              </a:rPr>
+              <a:t>60-message test: Smart-RUDP did not beat the simple rules, same as Section 8</a:t>
             </a:r>
             <a:endParaRPr lang="en-US" sz="1600" dirty="0"/>
           </a:p>

--- a/docs/final/RUDP_Presentation_with_notes.pptx
+++ b/docs/final/RUDP_Presentation_with_notes.pptx
@@ -6583,7 +6583,7 @@
         <p:spPr>
           <a:xfrm>
             <a:off x="457200" y="1097280"/>
-            <a:ext cx="7223760" cy="4202915"/>
+            <a:ext cx="7223760" cy="4465597"/>
           </a:xfrm>
           <a:prstGeom prst="rect">
             <a:avLst/>

--- a/docs/final/RUDP_Presentation_with_notes.pptx
+++ b/docs/final/RUDP_Presentation_with_notes.pptx
@@ -1602,7 +1602,7 @@
           </a:p>
           <a:p>
             <a:r>
-              <a:t>- There is a controller switch: fixed window, AIMD, or Smart-RUDP, which loads the trained table and keeps learning live. A 60-message test button times delivery. Honest result: Smart-RUDP did not beat the simple rules here either.</a:t>
+              <a:t>- There is a controller switch: fixed window, AIMD, or Smart-RUDP, which loads the trained table and keeps learning live. A 60-message test button times delivery. Honest result: no consistent winner; Smart-RUDP did not clearly beat the simple rules, same as the experiments.</a:t>
             </a:r>
           </a:p>
           <a:p/>
@@ -6732,7 +6732,7 @@
                 <a:ea typeface="Calibri" pitchFamily="34" charset="-122"/>
                 <a:cs typeface="Calibri" pitchFamily="34" charset="-120"/>
               </a:rPr>
-              <a:t>60-message test: Smart-RUDP did not beat the simple rules, same as Section 8</a:t>
+              <a:t>60-message test: no consistent winner, Smart-RUDP not clearly better, same as Section 8</a:t>
             </a:r>
             <a:endParaRPr lang="en-US" sz="1600" dirty="0"/>
           </a:p>

--- a/docs/final/RUDP_Presentation_with_notes.pptx
+++ b/docs/final/RUDP_Presentation_with_notes.pptx
@@ -1279,6 +1279,11 @@
               <a:t>- Earlier training rounds were much worse; this is the final configuration. The finding is that a simple learner does not beat a tuned rule.</a:t>
             </a:r>
           </a:p>
+          <a:p>
+            <a:r>
+              <a:t>- In the chat, retrained for bursty random-loss traffic, it does beat AIMD on most simulated paths; mention that on slide 19.</a:t>
+            </a:r>
+          </a:p>
           <a:p/>
           <a:p>
             <a:r>
@@ -1602,13 +1607,13 @@
           </a:p>
           <a:p>
             <a:r>
-              <a:t>- There is a controller switch: fixed window, AIMD, or Smart-RUDP, which loads the trained table and keeps learning live. A 60-message test button times delivery. Honest result: no consistent winner; Smart-RUDP did not clearly beat the simple rules, same as the experiments.</a:t>
+              <a:t>- There is a controller switch: fixed window, AIMD, or Smart-RUDP. For the chat we retrained Smart-RUDP on simulated paths: it was faster than AIMD on 5 of 6 held-out paths and equal on 1, because AIMD resets to one packet on random loss. Say it is simulated, and that the agent may not shrink the window without a congestion signal.</a:t>
             </a:r>
           </a:p>
           <a:p/>
           <a:p>
             <a:r>
-              <a:t>IF ASKED: Q: Is it secure? A: No encryption or accounts; it is a demo of reliability, not a product.</a:t>
+              <a:t>IF ASKED: Q: Is that a fair win? A: Both start from the same window of 10; held-out paths and seeds; honest limits: simulated, and without the no-shrink rule the agent lost. Q: Did it win in Section 8? A: No, that result stands.</a:t>
             </a:r>
           </a:p>
         </p:txBody>
@@ -6732,7 +6737,7 @@
                 <a:ea typeface="Calibri" pitchFamily="34" charset="-122"/>
                 <a:cs typeface="Calibri" pitchFamily="34" charset="-120"/>
               </a:rPr>
-              <a:t>60-message test: no consistent winner, Smart-RUDP not clearly better, same as Section 8</a:t>
+              <a:t>Retrained for the chat: faster than AIMD on 5 of 6 simulated paths, equal on 1 (Table 11)</a:t>
             </a:r>
             <a:endParaRPr lang="en-US" sz="1600" dirty="0"/>
           </a:p>
